--- a/BACKUP&RECOVERY/15장/15장_RMAN_복구_시나리오.pptx
+++ b/BACKUP&RECOVERY/15장/15장_RMAN_복구_시나리오.pptx
@@ -6357,7 +6357,7 @@
                 <a:latin typeface="Consolas"/>
                 <a:ea typeface="Consolas"/>
               </a:rPr>
-              <a:t>channel ORA_DISK_1: restoring datafile 00007 to /u02/oradata/ORCL/users01.dbf</a:t>
+              <a:t>channel ORA_DISK_1: restoring datafile 00007 to /u01/app/oracle/oradata/orcl/users01.dbf</a:t>
             </a:r>
           </a:p>
           <a:p>
@@ -6442,7 +6442,7 @@
                 <a:latin typeface="Consolas"/>
                 <a:ea typeface="Consolas"/>
               </a:rPr>
-              <a:t>archived log file name=/u02/arch1/1_21_1190530011.dbf thread=1 sequence=21</a:t>
+              <a:t>archived log file name=/home/oracle/arch1/arch_1_21_1200592300.arc thread=1 sequence=21</a:t>
             </a:r>
           </a:p>
           <a:p>
@@ -8435,7 +8435,7 @@
                 <a:latin typeface="Consolas"/>
                 <a:ea typeface="Consolas"/>
               </a:rPr>
-              <a:t>  2&gt;   ''/u02/oradata/ORCL/tbs_new01.dbf''";</a:t>
+              <a:t>  2&gt;   ''/u01/app/oracle/oradata/orcl/tbs_new01.dbf''";</a:t>
             </a:r>
           </a:p>
           <a:p>
@@ -8486,7 +8486,7 @@
                 <a:latin typeface="Consolas"/>
                 <a:ea typeface="Consolas"/>
               </a:rPr>
-              <a:t>archived log file name=/u02/arch1/1_19_1190530011.dbf thread=1 sequence=19</a:t>
+              <a:t>archived log file name=/home/oracle/arch1/arch_1_19_1200592300.arc thread=1 sequence=19</a:t>
             </a:r>
           </a:p>
           <a:p>
@@ -9298,41 +9298,41 @@
                 <a:latin typeface="Consolas"/>
                 <a:ea typeface="Consolas"/>
               </a:rPr>
-              <a:t>output file name=/u01/app/oracle/oradata/ORCL/control01.ctl</a:t>
-            </a:r>
-          </a:p>
-          <a:p>
-            <a:pPr>
-              <a:spcAft>
-                <a:spcPts val="0"/>
-              </a:spcAft>
-            </a:pPr>
-            <a:r>
-              <a:rPr sz="1250" b="0">
-                <a:solidFill>
-                  <a:srgbClr val="E6E6E6"/>
-                </a:solidFill>
-                <a:latin typeface="Consolas"/>
-                <a:ea typeface="Consolas"/>
-              </a:rPr>
-              <a:t>output file name=/u01/app/oracle/oradata/ORCL/control02.ctl</a:t>
-            </a:r>
-          </a:p>
-          <a:p>
-            <a:pPr>
-              <a:spcAft>
-                <a:spcPts val="0"/>
-              </a:spcAft>
-            </a:pPr>
-            <a:r>
-              <a:rPr sz="1250" b="0">
-                <a:solidFill>
-                  <a:srgbClr val="E6E6E6"/>
-                </a:solidFill>
-                <a:latin typeface="Consolas"/>
-                <a:ea typeface="Consolas"/>
-              </a:rPr>
-              <a:t>output file name=/u02/oradata/ORCL/control03.ctl</a:t>
+              <a:t>output file name=/u01/app/oracle/oradata/orcl/control01.ctl</a:t>
+            </a:r>
+          </a:p>
+          <a:p>
+            <a:pPr>
+              <a:spcAft>
+                <a:spcPts val="0"/>
+              </a:spcAft>
+            </a:pPr>
+            <a:r>
+              <a:rPr sz="1250" b="0">
+                <a:solidFill>
+                  <a:srgbClr val="E6E6E6"/>
+                </a:solidFill>
+                <a:latin typeface="Consolas"/>
+                <a:ea typeface="Consolas"/>
+              </a:rPr>
+              <a:t>output file name=/u01/app/oracle/oradata/orcl/control02.ctl</a:t>
+            </a:r>
+          </a:p>
+          <a:p>
+            <a:pPr>
+              <a:spcAft>
+                <a:spcPts val="0"/>
+              </a:spcAft>
+            </a:pPr>
+            <a:r>
+              <a:rPr sz="1250" b="0">
+                <a:solidFill>
+                  <a:srgbClr val="E6E6E6"/>
+                </a:solidFill>
+                <a:latin typeface="Consolas"/>
+                <a:ea typeface="Consolas"/>
+              </a:rPr>
+              <a:t>output file name=/u02/oradata/orcl/control03.ctl</a:t>
             </a:r>
           </a:p>
           <a:p>
